--- a/docs-source/figures/powerpoint/powerpoint_figures.pptx
+++ b/docs-source/figures/powerpoint/powerpoint_figures.pptx
@@ -212,7 +212,7 @@
           <a:p>
             <a:fld id="{711A52A6-9D8E-41FC-9651-78B3E515F872}" type="datetimeFigureOut">
               <a:rPr lang="en-US" smtClean="0"/>
-              <a:t>9/4/2025</a:t>
+              <a:t>11/24/2025</a:t>
             </a:fld>
             <a:endParaRPr lang="en-US"/>
           </a:p>
@@ -639,7 +639,7 @@
           <a:p>
             <a:fld id="{77F775AD-3704-4F98-A581-F4E052B5E341}" type="datetime1">
               <a:rPr lang="en-US" smtClean="0"/>
-              <a:t>9/4/2025</a:t>
+              <a:t>11/24/2025</a:t>
             </a:fld>
             <a:endParaRPr lang="en-US" dirty="0"/>
           </a:p>
@@ -888,7 +888,7 @@
           <a:p>
             <a:fld id="{B49B97F0-8049-4B63-9B9F-B08800B08AEA}" type="datetime1">
               <a:rPr lang="en-US" smtClean="0"/>
-              <a:t>9/4/2025</a:t>
+              <a:t>11/24/2025</a:t>
             </a:fld>
             <a:endParaRPr lang="en-US"/>
           </a:p>
@@ -1128,7 +1128,7 @@
           <a:p>
             <a:fld id="{76BB3555-78C2-4894-951A-9F28C24107FA}" type="datetime1">
               <a:rPr lang="en-US" smtClean="0"/>
-              <a:t>9/4/2025</a:t>
+              <a:t>11/24/2025</a:t>
             </a:fld>
             <a:endParaRPr lang="en-US"/>
           </a:p>
@@ -1358,7 +1358,7 @@
           <a:p>
             <a:fld id="{37A4B9B3-CD86-4259-A27A-F9B9C6081119}" type="datetime1">
               <a:rPr lang="en-US" smtClean="0"/>
-              <a:t>9/4/2025</a:t>
+              <a:t>11/24/2025</a:t>
             </a:fld>
             <a:endParaRPr lang="en-US"/>
           </a:p>
@@ -1636,7 +1636,7 @@
           <a:p>
             <a:fld id="{66287512-E62E-4968-99B9-D028D358C1D6}" type="datetime1">
               <a:rPr lang="en-US" smtClean="0"/>
-              <a:t>9/4/2025</a:t>
+              <a:t>11/24/2025</a:t>
             </a:fld>
             <a:endParaRPr lang="en-US"/>
           </a:p>
@@ -1959,7 +1959,7 @@
           <a:p>
             <a:fld id="{356AD7E7-9EE9-4D28-82A7-0AE338FFEED9}" type="datetime1">
               <a:rPr lang="en-US" smtClean="0"/>
-              <a:t>9/4/2025</a:t>
+              <a:t>11/24/2025</a:t>
             </a:fld>
             <a:endParaRPr lang="en-US"/>
           </a:p>
@@ -2433,7 +2433,7 @@
           <a:p>
             <a:fld id="{0B5CD5E0-6150-412F-8881-52709F06EC3B}" type="datetime1">
               <a:rPr lang="en-US" smtClean="0"/>
-              <a:t>9/4/2025</a:t>
+              <a:t>11/24/2025</a:t>
             </a:fld>
             <a:endParaRPr lang="en-US"/>
           </a:p>
@@ -2580,7 +2580,7 @@
           <a:p>
             <a:fld id="{9428AFA3-5281-4B53-8B8B-8FD665A2F0D7}" type="datetime1">
               <a:rPr lang="en-US" smtClean="0"/>
-              <a:t>9/4/2025</a:t>
+              <a:t>11/24/2025</a:t>
             </a:fld>
             <a:endParaRPr lang="en-US"/>
           </a:p>
@@ -2693,7 +2693,7 @@
           <a:p>
             <a:fld id="{556D1394-26AC-45DA-9E25-AB3CC25C7422}" type="datetime1">
               <a:rPr lang="en-US" smtClean="0"/>
-              <a:t>9/4/2025</a:t>
+              <a:t>11/24/2025</a:t>
             </a:fld>
             <a:endParaRPr lang="en-US"/>
           </a:p>
@@ -3018,7 +3018,7 @@
           <a:p>
             <a:fld id="{B641D803-18D9-4B72-95D8-021B736F630F}" type="datetime1">
               <a:rPr lang="en-US" smtClean="0"/>
-              <a:t>9/4/2025</a:t>
+              <a:t>11/24/2025</a:t>
             </a:fld>
             <a:endParaRPr lang="en-US"/>
           </a:p>
@@ -3310,7 +3310,7 @@
           <a:p>
             <a:fld id="{9F82DFCB-4787-4629-B4F0-DCD676BE203A}" type="datetime1">
               <a:rPr lang="en-US" smtClean="0"/>
-              <a:t>9/4/2025</a:t>
+              <a:t>11/24/2025</a:t>
             </a:fld>
             <a:endParaRPr lang="en-US"/>
           </a:p>
@@ -3550,7 +3550,7 @@
           <a:p>
             <a:fld id="{300C2ECC-D91C-40D5-A01C-469FC90F0645}" type="datetime1">
               <a:rPr lang="en-US" smtClean="0"/>
-              <a:t>9/4/2025</a:t>
+              <a:t>11/24/2025</a:t>
             </a:fld>
             <a:endParaRPr lang="en-US" dirty="0"/>
           </a:p>
@@ -12750,15 +12750,7 @@
           <a:p>
             <a:r>
               <a:rPr lang="en-US" sz="1600" dirty="0"/>
-              <a:t>    def </a:t>
-            </a:r>
-            <a:r>
-              <a:rPr lang="en-US" sz="1600" dirty="0" err="1"/>
-              <a:t>find_classification</a:t>
-            </a:r>
-            <a:r>
-              <a:rPr lang="en-US" sz="1600" dirty="0"/>
-              <a:t>(self, </a:t>
+              <a:t>    def classify(self, </a:t>
             </a:r>
             <a:r>
               <a:rPr lang="en-US" sz="1600" dirty="0" err="1"/>
@@ -12766,11 +12758,11 @@
             </a:r>
             <a:r>
               <a:rPr lang="en-US" sz="1600" dirty="0"/>
-              <a:t>, </a:t>
+              <a:t>={}, hists={}, **</a:t>
             </a:r>
             <a:r>
               <a:rPr lang="en-US" sz="1600" dirty="0" err="1"/>
-              <a:t>mdlhists</a:t>
+              <a:t>kwargs</a:t>
             </a:r>
             <a:r>
               <a:rPr lang="en-US" sz="1600" dirty="0"/>
@@ -13504,15 +13496,7 @@
           <a:p>
             <a:r>
               <a:rPr lang="en-US" sz="1600" dirty="0"/>
-              <a:t>def </a:t>
-            </a:r>
-            <a:r>
-              <a:rPr lang="en-US" sz="1600" dirty="0" err="1"/>
-              <a:t>find_classification</a:t>
-            </a:r>
-            <a:r>
-              <a:rPr lang="en-US" sz="1600" dirty="0"/>
-              <a:t>(self, </a:t>
+              <a:t> def classify(self, </a:t>
             </a:r>
             <a:r>
               <a:rPr lang="en-US" sz="1600" dirty="0" err="1"/>
@@ -13520,11 +13504,11 @@
             </a:r>
             <a:r>
               <a:rPr lang="en-US" sz="1600" dirty="0"/>
-              <a:t>, </a:t>
+              <a:t>={}, hists={}, **</a:t>
             </a:r>
             <a:r>
               <a:rPr lang="en-US" sz="1600" dirty="0" err="1"/>
-              <a:t>mdlhists</a:t>
+              <a:t>kwargs</a:t>
             </a:r>
             <a:r>
               <a:rPr lang="en-US" sz="1600" dirty="0"/>
@@ -22855,7 +22839,7 @@
           <a:p>
             <a:fld id="{5B2B2ECE-C27A-4FBC-A5B7-24ADD502157D}" type="datetime1">
               <a:rPr lang="en-US" smtClean="0"/>
-              <a:t>9/4/2025</a:t>
+              <a:t>11/24/2025</a:t>
             </a:fld>
             <a:endParaRPr lang="en-US"/>
           </a:p>
@@ -23075,7 +23059,7 @@
           <a:p>
             <a:fld id="{C8D67213-7DC7-4566-B4E8-39CBEF03CE40}" type="datetime1">
               <a:rPr lang="en-US" smtClean="0"/>
-              <a:t>9/4/2025</a:t>
+              <a:t>11/24/2025</a:t>
             </a:fld>
             <a:endParaRPr lang="en-US"/>
           </a:p>
@@ -23402,7 +23386,7 @@
           <a:p>
             <a:fld id="{7DBF9849-58D3-4F19-9398-5C19541DD8B5}" type="datetime1">
               <a:rPr lang="en-US" smtClean="0"/>
-              <a:t>9/4/2025</a:t>
+              <a:t>11/24/2025</a:t>
             </a:fld>
             <a:endParaRPr lang="en-US"/>
           </a:p>
@@ -24790,7 +24774,7 @@
           <a:p>
             <a:fld id="{97B5B71A-C210-4A41-9D4A-E72BF6E30274}" type="datetime1">
               <a:rPr lang="en-US" smtClean="0"/>
-              <a:t>9/4/2025</a:t>
+              <a:t>11/24/2025</a:t>
             </a:fld>
             <a:endParaRPr lang="en-US"/>
           </a:p>
@@ -25429,6 +25413,12 @@
 </file>
 
 <file path=customXml/item1.xml><?xml version="1.0" encoding="utf-8"?>
+<p:properties xmlns:p="http://schemas.microsoft.com/office/2006/metadata/properties" xmlns:xsi="http://www.w3.org/2001/XMLSchema-instance" xmlns:pc="http://schemas.microsoft.com/office/infopath/2007/PartnerControls">
+  <documentManagement/>
+</p:properties>
+</file>
+
+<file path=customXml/item2.xml><?xml version="1.0" encoding="utf-8"?>
 <ct:contentTypeSchema xmlns:ct="http://schemas.microsoft.com/office/2006/metadata/contentType" xmlns:ma="http://schemas.microsoft.com/office/2006/metadata/properties/metaAttributes" ct:_="" ma:_="" ma:contentTypeName="Document" ma:contentTypeID="0x0101002F0B4413AAFFE34B9A5E0B87EBB2BF4F" ma:contentTypeVersion="0" ma:contentTypeDescription="Create a new document." ma:contentTypeScope="" ma:versionID="9632435baf965c6c093711282b9a8698">
   <xsd:schema xmlns:xsd="http://www.w3.org/2001/XMLSchema" xmlns:xs="http://www.w3.org/2001/XMLSchema" xmlns:p="http://schemas.microsoft.com/office/2006/metadata/properties" targetNamespace="http://schemas.microsoft.com/office/2006/metadata/properties" ma:root="true" ma:fieldsID="ad47a0f10127d9e30d85633090e6731d">
     <xsd:element name="properties">
@@ -25542,12 +25532,6 @@
 </ct:contentTypeSchema>
 </file>
 
-<file path=customXml/item2.xml><?xml version="1.0" encoding="utf-8"?>
-<p:properties xmlns:p="http://schemas.microsoft.com/office/2006/metadata/properties" xmlns:xsi="http://www.w3.org/2001/XMLSchema-instance" xmlns:pc="http://schemas.microsoft.com/office/infopath/2007/PartnerControls">
-  <documentManagement/>
-</p:properties>
-</file>
-
 <file path=customXml/item3.xml><?xml version="1.0" encoding="utf-8"?>
 <?mso-contentType ?>
 <FormTemplates xmlns="http://schemas.microsoft.com/sharepoint/v3/contenttype/forms">
@@ -25558,6 +25542,21 @@
 </file>
 
 <file path=customXml/itemProps1.xml><?xml version="1.0" encoding="utf-8"?>
+<ds:datastoreItem xmlns:ds="http://schemas.openxmlformats.org/officeDocument/2006/customXml" ds:itemID="{92B7266E-DF44-460A-A16F-F5ABEAF9A56A}">
+  <ds:schemaRefs>
+    <ds:schemaRef ds:uri="http://schemas.microsoft.com/office/2006/metadata/properties"/>
+    <ds:schemaRef ds:uri="http://purl.org/dc/terms/"/>
+    <ds:schemaRef ds:uri="http://schemas.openxmlformats.org/package/2006/metadata/core-properties"/>
+    <ds:schemaRef ds:uri="http://purl.org/dc/dcmitype/"/>
+    <ds:schemaRef ds:uri="http://schemas.microsoft.com/office/infopath/2007/PartnerControls"/>
+    <ds:schemaRef ds:uri="http://schemas.microsoft.com/office/2006/documentManagement/types"/>
+    <ds:schemaRef ds:uri="http://purl.org/dc/elements/1.1/"/>
+    <ds:schemaRef ds:uri="http://www.w3.org/XML/1998/namespace"/>
+  </ds:schemaRefs>
+</ds:datastoreItem>
+</file>
+
+<file path=customXml/itemProps2.xml><?xml version="1.0" encoding="utf-8"?>
 <ds:datastoreItem xmlns:ds="http://schemas.openxmlformats.org/officeDocument/2006/customXml" ds:itemID="{8807AEC1-3868-4489-99AA-F6101CBA6951}">
   <ds:schemaRefs>
     <ds:schemaRef ds:uri="http://schemas.microsoft.com/office/2006/metadata/contentType"/>
@@ -25573,21 +25572,6 @@
 </ds:datastoreItem>
 </file>
 
-<file path=customXml/itemProps2.xml><?xml version="1.0" encoding="utf-8"?>
-<ds:datastoreItem xmlns:ds="http://schemas.openxmlformats.org/officeDocument/2006/customXml" ds:itemID="{92B7266E-DF44-460A-A16F-F5ABEAF9A56A}">
-  <ds:schemaRefs>
-    <ds:schemaRef ds:uri="http://schemas.microsoft.com/office/2006/metadata/properties"/>
-    <ds:schemaRef ds:uri="http://purl.org/dc/terms/"/>
-    <ds:schemaRef ds:uri="http://schemas.openxmlformats.org/package/2006/metadata/core-properties"/>
-    <ds:schemaRef ds:uri="http://purl.org/dc/dcmitype/"/>
-    <ds:schemaRef ds:uri="http://schemas.microsoft.com/office/infopath/2007/PartnerControls"/>
-    <ds:schemaRef ds:uri="http://schemas.microsoft.com/office/2006/documentManagement/types"/>
-    <ds:schemaRef ds:uri="http://purl.org/dc/elements/1.1/"/>
-    <ds:schemaRef ds:uri="http://www.w3.org/XML/1998/namespace"/>
-  </ds:schemaRefs>
-</ds:datastoreItem>
-</file>
-
 <file path=customXml/itemProps3.xml><?xml version="1.0" encoding="utf-8"?>
 <ds:datastoreItem xmlns:ds="http://schemas.openxmlformats.org/officeDocument/2006/customXml" ds:itemID="{D3728C9A-7C9B-4A99-A7F5-4857043C7DB3}">
   <ds:schemaRefs>
